--- a/AICW  Project PPT MALLIKA.pptx
+++ b/AICW  Project PPT MALLIKA.pptx
@@ -146,7 +146,7 @@
 <file path=ppt/revisionInfo.xml><?xml version="1.0" encoding="utf-8"?>
 <p1510:revInfo xmlns:a="http://schemas.openxmlformats.org/drawingml/2006/main" xmlns:r="http://schemas.openxmlformats.org/officeDocument/2006/relationships" xmlns:p1510="http://schemas.microsoft.com/office/powerpoint/2015/10/main">
   <p1510:revLst>
-    <p1510:client id="{2CF76B2D-B272-44A4-AF53-77AE9A5CF9EC}" v="3" dt="2026-04-14T06:10:43.434"/>
+    <p1510:client id="{2CF76B2D-B272-44A4-AF53-77AE9A5CF9EC}" v="20" dt="2026-04-19T11:33:23.947"/>
   </p1510:revLst>
 </p1510:revInfo>
 </file>
@@ -155,39 +155,154 @@
 <pc:chgInfo xmlns:a="http://schemas.openxmlformats.org/drawingml/2006/main" xmlns:r="http://schemas.openxmlformats.org/officeDocument/2006/relationships" xmlns:ac="http://schemas.microsoft.com/office/drawing/2013/main/command" xmlns:pc="http://schemas.microsoft.com/office/powerpoint/2013/main/command">
   <pc:docChgLst>
     <pc:chgData name="mallika s" userId="1e8d0b499702ec95" providerId="LiveId" clId="{97B18325-CED3-4E6A-B54C-CEAC36E183E0}"/>
-    <pc:docChg chg="custSel modSld">
-      <pc:chgData name="mallika s" userId="1e8d0b499702ec95" providerId="LiveId" clId="{97B18325-CED3-4E6A-B54C-CEAC36E183E0}" dt="2026-04-14T06:11:08.906" v="7" actId="14100"/>
+    <pc:docChg chg="undo custSel addSld delSld modSld">
+      <pc:chgData name="mallika s" userId="1e8d0b499702ec95" providerId="LiveId" clId="{97B18325-CED3-4E6A-B54C-CEAC36E183E0}" dt="2026-04-19T11:34:39.404" v="44" actId="47"/>
       <pc:docMkLst>
         <pc:docMk/>
       </pc:docMkLst>
+      <pc:sldChg chg="addSp modSp mod">
+        <pc:chgData name="mallika s" userId="1e8d0b499702ec95" providerId="LiveId" clId="{97B18325-CED3-4E6A-B54C-CEAC36E183E0}" dt="2026-04-19T11:21:46.301" v="22" actId="1076"/>
+        <pc:sldMkLst>
+          <pc:docMk/>
+          <pc:sldMk cId="0" sldId="260"/>
+        </pc:sldMkLst>
+        <pc:spChg chg="add mod">
+          <ac:chgData name="mallika s" userId="1e8d0b499702ec95" providerId="LiveId" clId="{97B18325-CED3-4E6A-B54C-CEAC36E183E0}" dt="2026-04-19T11:21:46.301" v="22" actId="1076"/>
+          <ac:spMkLst>
+            <pc:docMk/>
+            <pc:sldMk cId="0" sldId="260"/>
+            <ac:spMk id="2" creationId="{E937E88D-DC25-DAC3-3E59-D73F58A376D3}"/>
+          </ac:spMkLst>
+        </pc:spChg>
+        <pc:spChg chg="mod">
+          <ac:chgData name="mallika s" userId="1e8d0b499702ec95" providerId="LiveId" clId="{97B18325-CED3-4E6A-B54C-CEAC36E183E0}" dt="2026-04-19T11:21:36.944" v="20" actId="6549"/>
+          <ac:spMkLst>
+            <pc:docMk/>
+            <pc:sldMk cId="0" sldId="260"/>
+            <ac:spMk id="5" creationId="{00000000-0000-0000-0000-000000000000}"/>
+          </ac:spMkLst>
+        </pc:spChg>
+      </pc:sldChg>
       <pc:sldChg chg="addSp delSp modSp mod">
-        <pc:chgData name="mallika s" userId="1e8d0b499702ec95" providerId="LiveId" clId="{97B18325-CED3-4E6A-B54C-CEAC36E183E0}" dt="2026-04-14T06:11:08.906" v="7" actId="14100"/>
+        <pc:chgData name="mallika s" userId="1e8d0b499702ec95" providerId="LiveId" clId="{97B18325-CED3-4E6A-B54C-CEAC36E183E0}" dt="2026-04-19T11:19:46.825" v="19" actId="1076"/>
+        <pc:sldMkLst>
+          <pc:docMk/>
+          <pc:sldMk cId="0" sldId="261"/>
+        </pc:sldMkLst>
+        <pc:spChg chg="del mod">
+          <ac:chgData name="mallika s" userId="1e8d0b499702ec95" providerId="LiveId" clId="{97B18325-CED3-4E6A-B54C-CEAC36E183E0}" dt="2026-04-19T11:19:33.563" v="14"/>
+          <ac:spMkLst>
+            <pc:docMk/>
+            <pc:sldMk cId="0" sldId="261"/>
+            <ac:spMk id="22" creationId="{82A49159-7548-77FC-0BB4-BCC2D98D6142}"/>
+          </ac:spMkLst>
+        </pc:spChg>
+        <pc:picChg chg="add mod">
+          <ac:chgData name="mallika s" userId="1e8d0b499702ec95" providerId="LiveId" clId="{97B18325-CED3-4E6A-B54C-CEAC36E183E0}" dt="2026-04-19T11:19:46.825" v="19" actId="1076"/>
+          <ac:picMkLst>
+            <pc:docMk/>
+            <pc:sldMk cId="0" sldId="261"/>
+            <ac:picMk id="2050" creationId="{701EA943-F61C-731D-EA90-A14E5397000D}"/>
+          </ac:picMkLst>
+        </pc:picChg>
+      </pc:sldChg>
+      <pc:sldChg chg="add del">
+        <pc:chgData name="mallika s" userId="1e8d0b499702ec95" providerId="LiveId" clId="{97B18325-CED3-4E6A-B54C-CEAC36E183E0}" dt="2026-04-19T11:34:35.121" v="43" actId="47"/>
+        <pc:sldMkLst>
+          <pc:docMk/>
+          <pc:sldMk cId="0" sldId="264"/>
+        </pc:sldMkLst>
+      </pc:sldChg>
+      <pc:sldChg chg="addSp delSp modSp mod">
+        <pc:chgData name="mallika s" userId="1e8d0b499702ec95" providerId="LiveId" clId="{97B18325-CED3-4E6A-B54C-CEAC36E183E0}" dt="2026-04-19T11:33:23.947" v="41" actId="14100"/>
+        <pc:sldMkLst>
+          <pc:docMk/>
+          <pc:sldMk cId="914915445" sldId="269"/>
+        </pc:sldMkLst>
+        <pc:spChg chg="del">
+          <ac:chgData name="mallika s" userId="1e8d0b499702ec95" providerId="LiveId" clId="{97B18325-CED3-4E6A-B54C-CEAC36E183E0}" dt="2026-04-19T11:33:09.501" v="37" actId="478"/>
+          <ac:spMkLst>
+            <pc:docMk/>
+            <pc:sldMk cId="914915445" sldId="269"/>
+            <ac:spMk id="13" creationId="{D20BFC21-5190-5F06-8ADA-4589368BE763}"/>
+          </ac:spMkLst>
+        </pc:spChg>
+        <pc:picChg chg="add mod">
+          <ac:chgData name="mallika s" userId="1e8d0b499702ec95" providerId="LiveId" clId="{97B18325-CED3-4E6A-B54C-CEAC36E183E0}" dt="2026-04-19T11:33:23.947" v="41" actId="14100"/>
+          <ac:picMkLst>
+            <pc:docMk/>
+            <pc:sldMk cId="914915445" sldId="269"/>
+            <ac:picMk id="2050" creationId="{18A61EDB-9E0C-1B67-1EFA-87358CB5529F}"/>
+          </ac:picMkLst>
+        </pc:picChg>
+      </pc:sldChg>
+      <pc:sldChg chg="addSp delSp modSp mod">
+        <pc:chgData name="mallika s" userId="1e8d0b499702ec95" providerId="LiveId" clId="{97B18325-CED3-4E6A-B54C-CEAC36E183E0}" dt="2026-04-19T11:23:50.812" v="35" actId="1076"/>
         <pc:sldMkLst>
           <pc:docMk/>
           <pc:sldMk cId="3647308627" sldId="270"/>
         </pc:sldMkLst>
+        <pc:spChg chg="mod">
+          <ac:chgData name="mallika s" userId="1e8d0b499702ec95" providerId="LiveId" clId="{97B18325-CED3-4E6A-B54C-CEAC36E183E0}" dt="2026-04-19T11:23:32.691" v="31" actId="1076"/>
+          <ac:spMkLst>
+            <pc:docMk/>
+            <pc:sldMk cId="3647308627" sldId="270"/>
+            <ac:spMk id="4" creationId="{C82283BF-767D-6B72-6105-077DF8B7CC9E}"/>
+          </ac:spMkLst>
+        </pc:spChg>
+        <pc:spChg chg="mod">
+          <ac:chgData name="mallika s" userId="1e8d0b499702ec95" providerId="LiveId" clId="{97B18325-CED3-4E6A-B54C-CEAC36E183E0}" dt="2026-04-19T11:23:43.350" v="33" actId="1076"/>
+          <ac:spMkLst>
+            <pc:docMk/>
+            <pc:sldMk cId="3647308627" sldId="270"/>
+            <ac:spMk id="14" creationId="{F987E3E6-3838-ECA6-9B3D-03D493DAC259}"/>
+          </ac:spMkLst>
+        </pc:spChg>
+        <pc:spChg chg="mod">
+          <ac:chgData name="mallika s" userId="1e8d0b499702ec95" providerId="LiveId" clId="{97B18325-CED3-4E6A-B54C-CEAC36E183E0}" dt="2026-04-19T11:23:47.812" v="34" actId="1076"/>
+          <ac:spMkLst>
+            <pc:docMk/>
+            <pc:sldMk cId="3647308627" sldId="270"/>
+            <ac:spMk id="15" creationId="{6C2A02FD-373B-40E6-98F0-7DB44D57FA77}"/>
+          </ac:spMkLst>
+        </pc:spChg>
+        <pc:spChg chg="mod">
+          <ac:chgData name="mallika s" userId="1e8d0b499702ec95" providerId="LiveId" clId="{97B18325-CED3-4E6A-B54C-CEAC36E183E0}" dt="2026-04-19T11:23:38.908" v="32" actId="1076"/>
+          <ac:spMkLst>
+            <pc:docMk/>
+            <pc:sldMk cId="3647308627" sldId="270"/>
+            <ac:spMk id="16" creationId="{BEC040FA-D00B-C462-E239-6A16BA0F6991}"/>
+          </ac:spMkLst>
+        </pc:spChg>
         <pc:picChg chg="add mod">
-          <ac:chgData name="mallika s" userId="1e8d0b499702ec95" providerId="LiveId" clId="{97B18325-CED3-4E6A-B54C-CEAC36E183E0}" dt="2026-04-14T06:10:40.034" v="1"/>
+          <ac:chgData name="mallika s" userId="1e8d0b499702ec95" providerId="LiveId" clId="{97B18325-CED3-4E6A-B54C-CEAC36E183E0}" dt="2026-04-19T11:23:50.812" v="35" actId="1076"/>
           <ac:picMkLst>
             <pc:docMk/>
             <pc:sldMk cId="3647308627" sldId="270"/>
-            <ac:picMk id="2" creationId="{CC2C4EB6-B157-CB34-DEC5-D786BE9D6E51}"/>
+            <ac:picMk id="2" creationId="{FFDD4A31-A8B4-F951-5760-2A1AD5070597}"/>
           </ac:picMkLst>
         </pc:picChg>
-        <pc:picChg chg="add mod">
-          <ac:chgData name="mallika s" userId="1e8d0b499702ec95" providerId="LiveId" clId="{97B18325-CED3-4E6A-B54C-CEAC36E183E0}" dt="2026-04-14T06:11:08.906" v="7" actId="14100"/>
+        <pc:picChg chg="add del mod">
+          <ac:chgData name="mallika s" userId="1e8d0b499702ec95" providerId="LiveId" clId="{97B18325-CED3-4E6A-B54C-CEAC36E183E0}" dt="2026-04-19T11:22:36.819" v="23" actId="478"/>
           <ac:picMkLst>
             <pc:docMk/>
             <pc:sldMk cId="3647308627" sldId="270"/>
             <ac:picMk id="3" creationId="{01096FD4-7E10-5FE8-B974-1CFC27E03E73}"/>
           </ac:picMkLst>
         </pc:picChg>
-        <pc:picChg chg="del">
-          <ac:chgData name="mallika s" userId="1e8d0b499702ec95" providerId="LiveId" clId="{97B18325-CED3-4E6A-B54C-CEAC36E183E0}" dt="2026-04-14T06:10:41.862" v="2" actId="478"/>
+      </pc:sldChg>
+      <pc:sldChg chg="delSp modSp del">
+        <pc:chgData name="mallika s" userId="1e8d0b499702ec95" providerId="LiveId" clId="{97B18325-CED3-4E6A-B54C-CEAC36E183E0}" dt="2026-04-19T11:34:39.404" v="44" actId="47"/>
+        <pc:sldMkLst>
+          <pc:docMk/>
+          <pc:sldMk cId="2240738381" sldId="272"/>
+        </pc:sldMkLst>
+        <pc:picChg chg="del mod">
+          <ac:chgData name="mallika s" userId="1e8d0b499702ec95" providerId="LiveId" clId="{97B18325-CED3-4E6A-B54C-CEAC36E183E0}" dt="2026-04-19T11:19:35.361" v="15" actId="21"/>
           <ac:picMkLst>
             <pc:docMk/>
-            <pc:sldMk cId="3647308627" sldId="270"/>
-            <ac:picMk id="5" creationId="{0FEA421F-9056-3A9A-2085-17BA8378F051}"/>
+            <pc:sldMk cId="2240738381" sldId="272"/>
+            <ac:picMk id="2050" creationId="{701EA943-F61C-731D-EA90-A14E5397000D}"/>
           </ac:picMkLst>
         </pc:picChg>
       </pc:sldChg>
@@ -6346,17 +6461,788 @@
           <a:bodyPr wrap="square" rtlCol="0" anchor="t"/>
           <a:lstStyle/>
           <a:p>
-            <a:r>
-              <a:rPr lang="en-US" dirty="0">
-                <a:latin typeface="Times New Roman" panose="02020603050405020304" pitchFamily="18" charset="0"/>
-                <a:cs typeface="Times New Roman" panose="02020603050405020304" pitchFamily="18" charset="0"/>
-              </a:rPr>
-              <a:t>To address the challenges in traditional feedback systems, this project proposes the development of an AI-based Student Feedback &amp; Teaching Improvement Analyzer that transforms unstructured student feedback into meaningful insights. The system collects both quantitative ratings and qualitative comments and applies techniques such as sentiment analysis, data analytics, and statistical modeling to evaluate teaching quality and course effectiveness. It provides a comprehensive decision support system for faculty and administrators by identifying strengths, highlighting areas for improvement, and uncovering patterns and trends over time. Additionally, the solution integrates interactive visualizations such as charts and dashboards to present insights in an easy-to-understand manner. This enables institutions to make data-driven decisions, continuously monitor performance, and enhance overall teaching methodologies and student learning outcomes.</a:t>
-            </a:r>
             <a:endParaRPr lang="en-US" dirty="0">
               <a:latin typeface="Lato" panose="020F0502020204030203" pitchFamily="34" charset="0"/>
               <a:cs typeface="Arial" panose="020B0604020202020204" pitchFamily="34" charset="0"/>
             </a:endParaRPr>
+          </a:p>
+        </p:txBody>
+      </p:sp>
+      <p:sp>
+        <p:nvSpPr>
+          <p:cNvPr id="2" name="Rectangle 1">
+            <a:extLst>
+              <a:ext uri="{FF2B5EF4-FFF2-40B4-BE49-F238E27FC236}">
+                <a16:creationId xmlns:a16="http://schemas.microsoft.com/office/drawing/2014/main" id="{E937E88D-DC25-DAC3-3E59-D73F58A376D3}"/>
+              </a:ext>
+            </a:extLst>
+          </p:cNvPr>
+          <p:cNvSpPr>
+            <a:spLocks noChangeArrowheads="1"/>
+          </p:cNvSpPr>
+          <p:nvPr/>
+        </p:nvSpPr>
+        <p:spPr bwMode="auto">
+          <a:xfrm>
+            <a:off x="125486" y="2578784"/>
+            <a:ext cx="9144000" cy="0"/>
+          </a:xfrm>
+          <a:prstGeom prst="rect">
+            <a:avLst/>
+          </a:prstGeom>
+          <a:noFill/>
+          <a:ln>
+            <a:noFill/>
+          </a:ln>
+          <a:effectLst/>
+          <a:extLst>
+            <a:ext uri="{909E8E84-426E-40DD-AFC4-6F175D3DCCD1}">
+              <a14:hiddenFill xmlns:a14="http://schemas.microsoft.com/office/drawing/2010/main">
+                <a:solidFill>
+                  <a:schemeClr val="accent1"/>
+                </a:solidFill>
+              </a14:hiddenFill>
+            </a:ext>
+            <a:ext uri="{91240B29-F687-4F45-9708-019B960494DF}">
+              <a14:hiddenLine xmlns:a14="http://schemas.microsoft.com/office/drawing/2010/main" w="9525">
+                <a:solidFill>
+                  <a:schemeClr val="tx1"/>
+                </a:solidFill>
+                <a:miter lim="800000"/>
+                <a:headEnd/>
+                <a:tailEnd/>
+              </a14:hiddenLine>
+            </a:ext>
+            <a:ext uri="{AF507438-7753-43E0-B8FC-AC1667EBCBE1}">
+              <a14:hiddenEffects xmlns:a14="http://schemas.microsoft.com/office/drawing/2010/main">
+                <a:effectLst>
+                  <a:outerShdw dist="35921" dir="2700000" algn="ctr" rotWithShape="0">
+                    <a:schemeClr val="bg2"/>
+                  </a:outerShdw>
+                </a:effectLst>
+              </a14:hiddenEffects>
+            </a:ext>
+          </a:extLst>
+        </p:spPr>
+        <p:txBody>
+          <a:bodyPr vert="horz" wrap="none" lIns="91440" tIns="45720" rIns="91440" bIns="45720" numCol="1" anchor="ctr" anchorCtr="0" compatLnSpc="1">
+            <a:prstTxWarp prst="textNoShape">
+              <a:avLst/>
+            </a:prstTxWarp>
+            <a:spAutoFit/>
+          </a:bodyPr>
+          <a:lstStyle/>
+          <a:p>
+            <a:pPr marL="0" marR="0" lvl="0" indent="0" algn="l" defTabSz="914400" rtl="0" eaLnBrk="0" fontAlgn="base" latinLnBrk="0" hangingPunct="0">
+              <a:lnSpc>
+                <a:spcPct val="100000"/>
+              </a:lnSpc>
+              <a:spcBef>
+                <a:spcPct val="0"/>
+              </a:spcBef>
+              <a:spcAft>
+                <a:spcPct val="0"/>
+              </a:spcAft>
+              <a:buClrTx/>
+              <a:buSzTx/>
+              <a:buFontTx/>
+              <a:buNone/>
+              <a:tabLst/>
+            </a:pPr>
+            <a:endParaRPr kumimoji="0" lang="en-US" altLang="en-US" sz="1800" b="0" i="0" u="none" strike="noStrike" cap="none" normalizeH="0" baseline="0" dirty="0">
+              <a:ln>
+                <a:noFill/>
+              </a:ln>
+              <a:solidFill>
+                <a:schemeClr val="tx1"/>
+              </a:solidFill>
+              <a:effectLst/>
+              <a:latin typeface="Arial" panose="020B0604020202020204" pitchFamily="34" charset="0"/>
+            </a:endParaRPr>
+          </a:p>
+          <a:p>
+            <a:pPr marL="0" marR="0" lvl="0" indent="0" algn="l" defTabSz="914400" rtl="0" eaLnBrk="0" fontAlgn="base" latinLnBrk="0" hangingPunct="0">
+              <a:lnSpc>
+                <a:spcPct val="100000"/>
+              </a:lnSpc>
+              <a:spcBef>
+                <a:spcPct val="0"/>
+              </a:spcBef>
+              <a:spcAft>
+                <a:spcPct val="0"/>
+              </a:spcAft>
+              <a:buClrTx/>
+              <a:buSzTx/>
+              <a:buFontTx/>
+              <a:buChar char="•"/>
+              <a:tabLst/>
+            </a:pPr>
+            <a:r>
+              <a:rPr kumimoji="0" lang="en-US" altLang="en-US" sz="1800" b="0" i="0" u="none" strike="noStrike" cap="none" normalizeH="0" baseline="0" dirty="0">
+                <a:ln>
+                  <a:noFill/>
+                </a:ln>
+                <a:solidFill>
+                  <a:schemeClr val="tx1"/>
+                </a:solidFill>
+                <a:effectLst/>
+                <a:latin typeface="Arial" panose="020B0604020202020204" pitchFamily="34" charset="0"/>
+              </a:rPr>
+              <a:t>Develop an AI-based system to analyze student feedback for teaching improvement </a:t>
+            </a:r>
+          </a:p>
+          <a:p>
+            <a:pPr marL="0" marR="0" lvl="0" indent="0" algn="l" defTabSz="914400" rtl="0" eaLnBrk="0" fontAlgn="base" latinLnBrk="0" hangingPunct="0">
+              <a:lnSpc>
+                <a:spcPct val="100000"/>
+              </a:lnSpc>
+              <a:spcBef>
+                <a:spcPct val="0"/>
+              </a:spcBef>
+              <a:spcAft>
+                <a:spcPct val="0"/>
+              </a:spcAft>
+              <a:buClrTx/>
+              <a:buSzTx/>
+              <a:buFontTx/>
+              <a:buChar char="•"/>
+              <a:tabLst/>
+            </a:pPr>
+            <a:r>
+              <a:rPr kumimoji="0" lang="en-US" altLang="en-US" sz="1800" b="0" i="0" u="none" strike="noStrike" cap="none" normalizeH="0" baseline="0" dirty="0">
+                <a:ln>
+                  <a:noFill/>
+                </a:ln>
+                <a:solidFill>
+                  <a:schemeClr val="tx1"/>
+                </a:solidFill>
+                <a:effectLst/>
+                <a:latin typeface="Arial" panose="020B0604020202020204" pitchFamily="34" charset="0"/>
+              </a:rPr>
+              <a:t>Collect both </a:t>
+            </a:r>
+            <a:r>
+              <a:rPr kumimoji="0" lang="en-US" altLang="en-US" sz="1800" b="1" i="0" u="none" strike="noStrike" cap="none" normalizeH="0" baseline="0" dirty="0">
+                <a:ln>
+                  <a:noFill/>
+                </a:ln>
+                <a:solidFill>
+                  <a:schemeClr val="tx1"/>
+                </a:solidFill>
+                <a:effectLst/>
+                <a:latin typeface="Arial" panose="020B0604020202020204" pitchFamily="34" charset="0"/>
+              </a:rPr>
+              <a:t>quantitative data</a:t>
+            </a:r>
+            <a:r>
+              <a:rPr kumimoji="0" lang="en-US" altLang="en-US" sz="1800" b="0" i="0" u="none" strike="noStrike" cap="none" normalizeH="0" baseline="0" dirty="0">
+                <a:ln>
+                  <a:noFill/>
+                </a:ln>
+                <a:solidFill>
+                  <a:schemeClr val="tx1"/>
+                </a:solidFill>
+                <a:effectLst/>
+                <a:latin typeface="Arial" panose="020B0604020202020204" pitchFamily="34" charset="0"/>
+              </a:rPr>
+              <a:t> (ratings) and </a:t>
+            </a:r>
+            <a:r>
+              <a:rPr kumimoji="0" lang="en-US" altLang="en-US" sz="1800" b="1" i="0" u="none" strike="noStrike" cap="none" normalizeH="0" baseline="0" dirty="0">
+                <a:ln>
+                  <a:noFill/>
+                </a:ln>
+                <a:solidFill>
+                  <a:schemeClr val="tx1"/>
+                </a:solidFill>
+                <a:effectLst/>
+                <a:latin typeface="Arial" panose="020B0604020202020204" pitchFamily="34" charset="0"/>
+              </a:rPr>
+              <a:t>qualitative data</a:t>
+            </a:r>
+            <a:r>
+              <a:rPr kumimoji="0" lang="en-US" altLang="en-US" sz="1800" b="0" i="0" u="none" strike="noStrike" cap="none" normalizeH="0" baseline="0" dirty="0">
+                <a:ln>
+                  <a:noFill/>
+                </a:ln>
+                <a:solidFill>
+                  <a:schemeClr val="tx1"/>
+                </a:solidFill>
+                <a:effectLst/>
+                <a:latin typeface="Arial" panose="020B0604020202020204" pitchFamily="34" charset="0"/>
+              </a:rPr>
+              <a:t> (comments) </a:t>
+            </a:r>
+          </a:p>
+          <a:p>
+            <a:pPr marL="0" marR="0" lvl="0" indent="0" algn="l" defTabSz="914400" rtl="0" eaLnBrk="0" fontAlgn="base" latinLnBrk="0" hangingPunct="0">
+              <a:lnSpc>
+                <a:spcPct val="100000"/>
+              </a:lnSpc>
+              <a:spcBef>
+                <a:spcPct val="0"/>
+              </a:spcBef>
+              <a:spcAft>
+                <a:spcPct val="0"/>
+              </a:spcAft>
+              <a:buClrTx/>
+              <a:buSzTx/>
+              <a:buFontTx/>
+              <a:buChar char="•"/>
+              <a:tabLst/>
+            </a:pPr>
+            <a:r>
+              <a:rPr kumimoji="0" lang="en-US" altLang="en-US" sz="1800" b="0" i="0" u="none" strike="noStrike" cap="none" normalizeH="0" baseline="0" dirty="0">
+                <a:ln>
+                  <a:noFill/>
+                </a:ln>
+                <a:solidFill>
+                  <a:schemeClr val="tx1"/>
+                </a:solidFill>
+                <a:effectLst/>
+                <a:latin typeface="Arial" panose="020B0604020202020204" pitchFamily="34" charset="0"/>
+              </a:rPr>
+              <a:t>Use </a:t>
+            </a:r>
+            <a:r>
+              <a:rPr kumimoji="0" lang="en-US" altLang="en-US" sz="1800" b="1" i="0" u="none" strike="noStrike" cap="none" normalizeH="0" baseline="0" dirty="0">
+                <a:ln>
+                  <a:noFill/>
+                </a:ln>
+                <a:solidFill>
+                  <a:schemeClr val="tx1"/>
+                </a:solidFill>
+                <a:effectLst/>
+                <a:latin typeface="Arial" panose="020B0604020202020204" pitchFamily="34" charset="0"/>
+              </a:rPr>
+              <a:t>sentiment analysis</a:t>
+            </a:r>
+            <a:r>
+              <a:rPr kumimoji="0" lang="en-US" altLang="en-US" sz="1800" b="0" i="0" u="none" strike="noStrike" cap="none" normalizeH="0" baseline="0" dirty="0">
+                <a:ln>
+                  <a:noFill/>
+                </a:ln>
+                <a:solidFill>
+                  <a:schemeClr val="tx1"/>
+                </a:solidFill>
+                <a:effectLst/>
+                <a:latin typeface="Arial" panose="020B0604020202020204" pitchFamily="34" charset="0"/>
+              </a:rPr>
+              <a:t> to understand student opinions and emotions </a:t>
+            </a:r>
+          </a:p>
+          <a:p>
+            <a:pPr marL="0" marR="0" lvl="0" indent="0" algn="l" defTabSz="914400" rtl="0" eaLnBrk="0" fontAlgn="base" latinLnBrk="0" hangingPunct="0">
+              <a:lnSpc>
+                <a:spcPct val="100000"/>
+              </a:lnSpc>
+              <a:spcBef>
+                <a:spcPct val="0"/>
+              </a:spcBef>
+              <a:spcAft>
+                <a:spcPct val="0"/>
+              </a:spcAft>
+              <a:buClrTx/>
+              <a:buSzTx/>
+              <a:buFontTx/>
+              <a:buChar char="•"/>
+              <a:tabLst/>
+            </a:pPr>
+            <a:r>
+              <a:rPr kumimoji="0" lang="en-US" altLang="en-US" sz="1800" b="0" i="0" u="none" strike="noStrike" cap="none" normalizeH="0" baseline="0" dirty="0">
+                <a:ln>
+                  <a:noFill/>
+                </a:ln>
+                <a:solidFill>
+                  <a:schemeClr val="tx1"/>
+                </a:solidFill>
+                <a:effectLst/>
+                <a:latin typeface="Arial" panose="020B0604020202020204" pitchFamily="34" charset="0"/>
+              </a:rPr>
+              <a:t>Apply </a:t>
+            </a:r>
+            <a:r>
+              <a:rPr kumimoji="0" lang="en-US" altLang="en-US" sz="1800" b="1" i="0" u="none" strike="noStrike" cap="none" normalizeH="0" baseline="0" dirty="0">
+                <a:ln>
+                  <a:noFill/>
+                </a:ln>
+                <a:solidFill>
+                  <a:schemeClr val="tx1"/>
+                </a:solidFill>
+                <a:effectLst/>
+                <a:latin typeface="Arial" panose="020B0604020202020204" pitchFamily="34" charset="0"/>
+              </a:rPr>
+              <a:t>data analytics and statistical modeling</a:t>
+            </a:r>
+            <a:r>
+              <a:rPr kumimoji="0" lang="en-US" altLang="en-US" sz="1800" b="0" i="0" u="none" strike="noStrike" cap="none" normalizeH="0" baseline="0" dirty="0">
+                <a:ln>
+                  <a:noFill/>
+                </a:ln>
+                <a:solidFill>
+                  <a:schemeClr val="tx1"/>
+                </a:solidFill>
+                <a:effectLst/>
+                <a:latin typeface="Arial" panose="020B0604020202020204" pitchFamily="34" charset="0"/>
+              </a:rPr>
+              <a:t> to evaluate teaching effectiveness </a:t>
+            </a:r>
+          </a:p>
+          <a:p>
+            <a:pPr marL="0" marR="0" lvl="0" indent="0" algn="l" defTabSz="914400" rtl="0" eaLnBrk="0" fontAlgn="base" latinLnBrk="0" hangingPunct="0">
+              <a:lnSpc>
+                <a:spcPct val="100000"/>
+              </a:lnSpc>
+              <a:spcBef>
+                <a:spcPct val="0"/>
+              </a:spcBef>
+              <a:spcAft>
+                <a:spcPct val="0"/>
+              </a:spcAft>
+              <a:buClrTx/>
+              <a:buSzTx/>
+              <a:buFontTx/>
+              <a:buChar char="•"/>
+              <a:tabLst/>
+            </a:pPr>
+            <a:r>
+              <a:rPr kumimoji="0" lang="en-US" altLang="en-US" sz="1800" b="0" i="0" u="none" strike="noStrike" cap="none" normalizeH="0" baseline="0" dirty="0">
+                <a:ln>
+                  <a:noFill/>
+                </a:ln>
+                <a:solidFill>
+                  <a:schemeClr val="tx1"/>
+                </a:solidFill>
+                <a:effectLst/>
+                <a:latin typeface="Arial" panose="020B0604020202020204" pitchFamily="34" charset="0"/>
+              </a:rPr>
+              <a:t>Transform unstructured feedback into </a:t>
+            </a:r>
+            <a:r>
+              <a:rPr kumimoji="0" lang="en-US" altLang="en-US" sz="1800" b="1" i="0" u="none" strike="noStrike" cap="none" normalizeH="0" baseline="0" dirty="0">
+                <a:ln>
+                  <a:noFill/>
+                </a:ln>
+                <a:solidFill>
+                  <a:schemeClr val="tx1"/>
+                </a:solidFill>
+                <a:effectLst/>
+                <a:latin typeface="Arial" panose="020B0604020202020204" pitchFamily="34" charset="0"/>
+              </a:rPr>
+              <a:t>clear, actionable insights</a:t>
+            </a:r>
+            <a:r>
+              <a:rPr kumimoji="0" lang="en-US" altLang="en-US" sz="1800" b="0" i="0" u="none" strike="noStrike" cap="none" normalizeH="0" baseline="0" dirty="0">
+                <a:ln>
+                  <a:noFill/>
+                </a:ln>
+                <a:solidFill>
+                  <a:schemeClr val="tx1"/>
+                </a:solidFill>
+                <a:effectLst/>
+                <a:latin typeface="Arial" panose="020B0604020202020204" pitchFamily="34" charset="0"/>
+              </a:rPr>
+              <a:t> </a:t>
+            </a:r>
+          </a:p>
+          <a:p>
+            <a:pPr marL="0" marR="0" lvl="0" indent="0" algn="l" defTabSz="914400" rtl="0" eaLnBrk="0" fontAlgn="base" latinLnBrk="0" hangingPunct="0">
+              <a:lnSpc>
+                <a:spcPct val="100000"/>
+              </a:lnSpc>
+              <a:spcBef>
+                <a:spcPct val="0"/>
+              </a:spcBef>
+              <a:spcAft>
+                <a:spcPct val="0"/>
+              </a:spcAft>
+              <a:buClrTx/>
+              <a:buSzTx/>
+              <a:buFontTx/>
+              <a:buChar char="•"/>
+              <a:tabLst/>
+            </a:pPr>
+            <a:r>
+              <a:rPr kumimoji="0" lang="en-US" altLang="en-US" sz="1800" b="0" i="0" u="none" strike="noStrike" cap="none" normalizeH="0" baseline="0" dirty="0">
+                <a:ln>
+                  <a:noFill/>
+                </a:ln>
+                <a:solidFill>
+                  <a:schemeClr val="tx1"/>
+                </a:solidFill>
+                <a:effectLst/>
+                <a:latin typeface="Arial" panose="020B0604020202020204" pitchFamily="34" charset="0"/>
+              </a:rPr>
+              <a:t>Identify </a:t>
+            </a:r>
+            <a:r>
+              <a:rPr kumimoji="0" lang="en-US" altLang="en-US" sz="1800" b="1" i="0" u="none" strike="noStrike" cap="none" normalizeH="0" baseline="0" dirty="0">
+                <a:ln>
+                  <a:noFill/>
+                </a:ln>
+                <a:solidFill>
+                  <a:schemeClr val="tx1"/>
+                </a:solidFill>
+                <a:effectLst/>
+                <a:latin typeface="Arial" panose="020B0604020202020204" pitchFamily="34" charset="0"/>
+              </a:rPr>
+              <a:t>strengths and weaknesses</a:t>
+            </a:r>
+            <a:r>
+              <a:rPr kumimoji="0" lang="en-US" altLang="en-US" sz="1800" b="0" i="0" u="none" strike="noStrike" cap="none" normalizeH="0" baseline="0" dirty="0">
+                <a:ln>
+                  <a:noFill/>
+                </a:ln>
+                <a:solidFill>
+                  <a:schemeClr val="tx1"/>
+                </a:solidFill>
+                <a:effectLst/>
+                <a:latin typeface="Arial" panose="020B0604020202020204" pitchFamily="34" charset="0"/>
+              </a:rPr>
+              <a:t> in teaching methods and course delivery </a:t>
+            </a:r>
+          </a:p>
+          <a:p>
+            <a:pPr marL="0" marR="0" lvl="0" indent="0" algn="l" defTabSz="914400" rtl="0" eaLnBrk="0" fontAlgn="base" latinLnBrk="0" hangingPunct="0">
+              <a:lnSpc>
+                <a:spcPct val="100000"/>
+              </a:lnSpc>
+              <a:spcBef>
+                <a:spcPct val="0"/>
+              </a:spcBef>
+              <a:spcAft>
+                <a:spcPct val="0"/>
+              </a:spcAft>
+              <a:buClrTx/>
+              <a:buSzTx/>
+              <a:buFontTx/>
+              <a:buChar char="•"/>
+              <a:tabLst/>
+            </a:pPr>
+            <a:r>
+              <a:rPr kumimoji="0" lang="en-US" altLang="en-US" sz="1800" b="0" i="0" u="none" strike="noStrike" cap="none" normalizeH="0" baseline="0" dirty="0">
+                <a:ln>
+                  <a:noFill/>
+                </a:ln>
+                <a:solidFill>
+                  <a:schemeClr val="tx1"/>
+                </a:solidFill>
+                <a:effectLst/>
+                <a:latin typeface="Arial" panose="020B0604020202020204" pitchFamily="34" charset="0"/>
+              </a:rPr>
+              <a:t>Detect </a:t>
+            </a:r>
+            <a:r>
+              <a:rPr kumimoji="0" lang="en-US" altLang="en-US" sz="1800" b="1" i="0" u="none" strike="noStrike" cap="none" normalizeH="0" baseline="0" dirty="0">
+                <a:ln>
+                  <a:noFill/>
+                </a:ln>
+                <a:solidFill>
+                  <a:schemeClr val="tx1"/>
+                </a:solidFill>
+                <a:effectLst/>
+                <a:latin typeface="Arial" panose="020B0604020202020204" pitchFamily="34" charset="0"/>
+              </a:rPr>
+              <a:t>patterns and trends over time</a:t>
+            </a:r>
+            <a:r>
+              <a:rPr kumimoji="0" lang="en-US" altLang="en-US" sz="1800" b="0" i="0" u="none" strike="noStrike" cap="none" normalizeH="0" baseline="0" dirty="0">
+                <a:ln>
+                  <a:noFill/>
+                </a:ln>
+                <a:solidFill>
+                  <a:schemeClr val="tx1"/>
+                </a:solidFill>
+                <a:effectLst/>
+                <a:latin typeface="Arial" panose="020B0604020202020204" pitchFamily="34" charset="0"/>
+              </a:rPr>
+              <a:t> for continuous performance monitoring </a:t>
+            </a:r>
+          </a:p>
+          <a:p>
+            <a:pPr marL="0" marR="0" lvl="0" indent="0" algn="l" defTabSz="914400" rtl="0" eaLnBrk="0" fontAlgn="base" latinLnBrk="0" hangingPunct="0">
+              <a:lnSpc>
+                <a:spcPct val="100000"/>
+              </a:lnSpc>
+              <a:spcBef>
+                <a:spcPct val="0"/>
+              </a:spcBef>
+              <a:spcAft>
+                <a:spcPct val="0"/>
+              </a:spcAft>
+              <a:buClrTx/>
+              <a:buSzTx/>
+              <a:buFontTx/>
+              <a:buChar char="•"/>
+              <a:tabLst/>
+            </a:pPr>
+            <a:r>
+              <a:rPr kumimoji="0" lang="en-US" altLang="en-US" sz="1800" b="0" i="0" u="none" strike="noStrike" cap="none" normalizeH="0" baseline="0" dirty="0">
+                <a:ln>
+                  <a:noFill/>
+                </a:ln>
+                <a:solidFill>
+                  <a:schemeClr val="tx1"/>
+                </a:solidFill>
+                <a:effectLst/>
+                <a:latin typeface="Arial" panose="020B0604020202020204" pitchFamily="34" charset="0"/>
+              </a:rPr>
+              <a:t>Provide a </a:t>
+            </a:r>
+            <a:r>
+              <a:rPr kumimoji="0" lang="en-US" altLang="en-US" sz="1800" b="1" i="0" u="none" strike="noStrike" cap="none" normalizeH="0" baseline="0" dirty="0">
+                <a:ln>
+                  <a:noFill/>
+                </a:ln>
+                <a:solidFill>
+                  <a:schemeClr val="tx1"/>
+                </a:solidFill>
+                <a:effectLst/>
+                <a:latin typeface="Arial" panose="020B0604020202020204" pitchFamily="34" charset="0"/>
+              </a:rPr>
+              <a:t>decision support system</a:t>
+            </a:r>
+            <a:r>
+              <a:rPr kumimoji="0" lang="en-US" altLang="en-US" sz="1800" b="0" i="0" u="none" strike="noStrike" cap="none" normalizeH="0" baseline="0" dirty="0">
+                <a:ln>
+                  <a:noFill/>
+                </a:ln>
+                <a:solidFill>
+                  <a:schemeClr val="tx1"/>
+                </a:solidFill>
+                <a:effectLst/>
+                <a:latin typeface="Arial" panose="020B0604020202020204" pitchFamily="34" charset="0"/>
+              </a:rPr>
+              <a:t> for faculty and administrators </a:t>
+            </a:r>
+          </a:p>
+          <a:p>
+            <a:pPr marL="0" marR="0" lvl="0" indent="0" algn="l" defTabSz="914400" rtl="0" eaLnBrk="0" fontAlgn="base" latinLnBrk="0" hangingPunct="0">
+              <a:lnSpc>
+                <a:spcPct val="100000"/>
+              </a:lnSpc>
+              <a:spcBef>
+                <a:spcPct val="0"/>
+              </a:spcBef>
+              <a:spcAft>
+                <a:spcPct val="0"/>
+              </a:spcAft>
+              <a:buClrTx/>
+              <a:buSzTx/>
+              <a:buFontTx/>
+              <a:buChar char="•"/>
+              <a:tabLst/>
+            </a:pPr>
+            <a:r>
+              <a:rPr kumimoji="0" lang="en-US" altLang="en-US" sz="1800" b="0" i="0" u="none" strike="noStrike" cap="none" normalizeH="0" baseline="0" dirty="0">
+                <a:ln>
+                  <a:noFill/>
+                </a:ln>
+                <a:solidFill>
+                  <a:schemeClr val="tx1"/>
+                </a:solidFill>
+                <a:effectLst/>
+                <a:latin typeface="Arial" panose="020B0604020202020204" pitchFamily="34" charset="0"/>
+              </a:rPr>
+              <a:t>Integrate </a:t>
+            </a:r>
+            <a:r>
+              <a:rPr kumimoji="0" lang="en-US" altLang="en-US" sz="1800" b="1" i="0" u="none" strike="noStrike" cap="none" normalizeH="0" baseline="0" dirty="0">
+                <a:ln>
+                  <a:noFill/>
+                </a:ln>
+                <a:solidFill>
+                  <a:schemeClr val="tx1"/>
+                </a:solidFill>
+                <a:effectLst/>
+                <a:latin typeface="Arial" panose="020B0604020202020204" pitchFamily="34" charset="0"/>
+              </a:rPr>
+              <a:t>interactive visualizations</a:t>
+            </a:r>
+            <a:r>
+              <a:rPr kumimoji="0" lang="en-US" altLang="en-US" sz="1800" b="0" i="0" u="none" strike="noStrike" cap="none" normalizeH="0" baseline="0" dirty="0">
+                <a:ln>
+                  <a:noFill/>
+                </a:ln>
+                <a:solidFill>
+                  <a:schemeClr val="tx1"/>
+                </a:solidFill>
+                <a:effectLst/>
+                <a:latin typeface="Arial" panose="020B0604020202020204" pitchFamily="34" charset="0"/>
+              </a:rPr>
+              <a:t> (charts, dashboards) for easy interpretation </a:t>
+            </a:r>
+          </a:p>
+          <a:p>
+            <a:pPr marL="0" marR="0" lvl="0" indent="0" algn="l" defTabSz="914400" rtl="0" eaLnBrk="0" fontAlgn="base" latinLnBrk="0" hangingPunct="0">
+              <a:lnSpc>
+                <a:spcPct val="100000"/>
+              </a:lnSpc>
+              <a:spcBef>
+                <a:spcPct val="0"/>
+              </a:spcBef>
+              <a:spcAft>
+                <a:spcPct val="0"/>
+              </a:spcAft>
+              <a:buClrTx/>
+              <a:buSzTx/>
+              <a:buFontTx/>
+              <a:buChar char="•"/>
+              <a:tabLst/>
+            </a:pPr>
+            <a:r>
+              <a:rPr kumimoji="0" lang="en-US" altLang="en-US" sz="1800" b="0" i="0" u="none" strike="noStrike" cap="none" normalizeH="0" baseline="0" dirty="0">
+                <a:ln>
+                  <a:noFill/>
+                </a:ln>
+                <a:solidFill>
+                  <a:schemeClr val="tx1"/>
+                </a:solidFill>
+                <a:effectLst/>
+                <a:latin typeface="Arial" panose="020B0604020202020204" pitchFamily="34" charset="0"/>
+              </a:rPr>
+              <a:t>Enable </a:t>
+            </a:r>
+            <a:r>
+              <a:rPr kumimoji="0" lang="en-US" altLang="en-US" sz="1800" b="1" i="0" u="none" strike="noStrike" cap="none" normalizeH="0" baseline="0" dirty="0">
+                <a:ln>
+                  <a:noFill/>
+                </a:ln>
+                <a:solidFill>
+                  <a:schemeClr val="tx1"/>
+                </a:solidFill>
+                <a:effectLst/>
+                <a:latin typeface="Arial" panose="020B0604020202020204" pitchFamily="34" charset="0"/>
+              </a:rPr>
+              <a:t>data-driven decision-making</a:t>
+            </a:r>
+            <a:r>
+              <a:rPr kumimoji="0" lang="en-US" altLang="en-US" sz="1800" b="0" i="0" u="none" strike="noStrike" cap="none" normalizeH="0" baseline="0" dirty="0">
+                <a:ln>
+                  <a:noFill/>
+                </a:ln>
+                <a:solidFill>
+                  <a:schemeClr val="tx1"/>
+                </a:solidFill>
+                <a:effectLst/>
+                <a:latin typeface="Arial" panose="020B0604020202020204" pitchFamily="34" charset="0"/>
+              </a:rPr>
+              <a:t> in educational institutions </a:t>
+            </a:r>
+          </a:p>
+          <a:p>
+            <a:pPr marL="0" marR="0" lvl="0" indent="0" algn="l" defTabSz="914400" rtl="0" eaLnBrk="0" fontAlgn="base" latinLnBrk="0" hangingPunct="0">
+              <a:lnSpc>
+                <a:spcPct val="100000"/>
+              </a:lnSpc>
+              <a:spcBef>
+                <a:spcPct val="0"/>
+              </a:spcBef>
+              <a:spcAft>
+                <a:spcPct val="0"/>
+              </a:spcAft>
+              <a:buClrTx/>
+              <a:buSzTx/>
+              <a:buFontTx/>
+              <a:buChar char="•"/>
+              <a:tabLst/>
+            </a:pPr>
+            <a:r>
+              <a:rPr kumimoji="0" lang="en-US" altLang="en-US" sz="1800" b="0" i="0" u="none" strike="noStrike" cap="none" normalizeH="0" baseline="0" dirty="0">
+                <a:ln>
+                  <a:noFill/>
+                </a:ln>
+                <a:solidFill>
+                  <a:schemeClr val="tx1"/>
+                </a:solidFill>
+                <a:effectLst/>
+                <a:latin typeface="Arial" panose="020B0604020202020204" pitchFamily="34" charset="0"/>
+              </a:rPr>
+              <a:t>Support </a:t>
+            </a:r>
+            <a:r>
+              <a:rPr kumimoji="0" lang="en-US" altLang="en-US" sz="1800" b="1" i="0" u="none" strike="noStrike" cap="none" normalizeH="0" baseline="0" dirty="0">
+                <a:ln>
+                  <a:noFill/>
+                </a:ln>
+                <a:solidFill>
+                  <a:schemeClr val="tx1"/>
+                </a:solidFill>
+                <a:effectLst/>
+                <a:latin typeface="Arial" panose="020B0604020202020204" pitchFamily="34" charset="0"/>
+              </a:rPr>
+              <a:t>continuous improvement</a:t>
+            </a:r>
+            <a:r>
+              <a:rPr kumimoji="0" lang="en-US" altLang="en-US" sz="1800" b="0" i="0" u="none" strike="noStrike" cap="none" normalizeH="0" baseline="0" dirty="0">
+                <a:ln>
+                  <a:noFill/>
+                </a:ln>
+                <a:solidFill>
+                  <a:schemeClr val="tx1"/>
+                </a:solidFill>
+                <a:effectLst/>
+                <a:latin typeface="Arial" panose="020B0604020202020204" pitchFamily="34" charset="0"/>
+              </a:rPr>
+              <a:t> in teaching strategies </a:t>
+            </a:r>
+          </a:p>
+          <a:p>
+            <a:pPr marL="0" marR="0" lvl="0" indent="0" algn="l" defTabSz="914400" rtl="0" eaLnBrk="0" fontAlgn="base" latinLnBrk="0" hangingPunct="0">
+              <a:lnSpc>
+                <a:spcPct val="100000"/>
+              </a:lnSpc>
+              <a:spcBef>
+                <a:spcPct val="0"/>
+              </a:spcBef>
+              <a:spcAft>
+                <a:spcPct val="0"/>
+              </a:spcAft>
+              <a:buClrTx/>
+              <a:buSzTx/>
+              <a:buFontTx/>
+              <a:buChar char="•"/>
+              <a:tabLst/>
+            </a:pPr>
+            <a:r>
+              <a:rPr kumimoji="0" lang="en-US" altLang="en-US" sz="1800" b="0" i="0" u="none" strike="noStrike" cap="none" normalizeH="0" baseline="0" dirty="0">
+                <a:ln>
+                  <a:noFill/>
+                </a:ln>
+                <a:solidFill>
+                  <a:schemeClr val="tx1"/>
+                </a:solidFill>
+                <a:effectLst/>
+                <a:latin typeface="Arial" panose="020B0604020202020204" pitchFamily="34" charset="0"/>
+              </a:rPr>
+              <a:t>Enhance </a:t>
+            </a:r>
+            <a:r>
+              <a:rPr kumimoji="0" lang="en-US" altLang="en-US" sz="1800" b="1" i="0" u="none" strike="noStrike" cap="none" normalizeH="0" baseline="0" dirty="0">
+                <a:ln>
+                  <a:noFill/>
+                </a:ln>
+                <a:solidFill>
+                  <a:schemeClr val="tx1"/>
+                </a:solidFill>
+                <a:effectLst/>
+                <a:latin typeface="Arial" panose="020B0604020202020204" pitchFamily="34" charset="0"/>
+              </a:rPr>
+              <a:t>student learning outcomes and overall academic quality</a:t>
+            </a:r>
+            <a:r>
+              <a:rPr kumimoji="0" lang="en-US" altLang="en-US" sz="1800" b="0" i="0" u="none" strike="noStrike" cap="none" normalizeH="0" baseline="0" dirty="0">
+                <a:ln>
+                  <a:noFill/>
+                </a:ln>
+                <a:solidFill>
+                  <a:schemeClr val="tx1"/>
+                </a:solidFill>
+                <a:effectLst/>
+                <a:latin typeface="Arial" panose="020B0604020202020204" pitchFamily="34" charset="0"/>
+              </a:rPr>
+              <a:t> </a:t>
+            </a:r>
           </a:p>
         </p:txBody>
       </p:sp>
@@ -6569,91 +7455,53 @@
           </a:p>
         </p:txBody>
       </p:sp>
-      <p:sp>
-        <p:nvSpPr>
-          <p:cNvPr id="22" name="TextBox 21">
+      <p:pic>
+        <p:nvPicPr>
+          <p:cNvPr id="2050" name="Picture 2">
             <a:extLst>
               <a:ext uri="{FF2B5EF4-FFF2-40B4-BE49-F238E27FC236}">
-                <a16:creationId xmlns:a16="http://schemas.microsoft.com/office/drawing/2014/main" id="{82A49159-7548-77FC-0BB4-BCC2D98D6142}"/>
+                <a16:creationId xmlns:a16="http://schemas.microsoft.com/office/drawing/2014/main" id="{701EA943-F61C-731D-EA90-A14E5397000D}"/>
               </a:ext>
             </a:extLst>
           </p:cNvPr>
-          <p:cNvSpPr txBox="1"/>
+          <p:cNvPicPr>
+            <a:picLocks noChangeAspect="1" noChangeArrowheads="1"/>
+          </p:cNvPicPr>
           <p:nvPr/>
-        </p:nvSpPr>
-        <p:spPr>
+        </p:nvPicPr>
+        <p:blipFill>
+          <a:blip r:embed="rId4">
+            <a:extLst>
+              <a:ext uri="{28A0092B-C50C-407E-A947-70E740481C1C}">
+                <a14:useLocalDpi xmlns:a14="http://schemas.microsoft.com/office/drawing/2010/main" val="0"/>
+              </a:ext>
+            </a:extLst>
+          </a:blip>
+          <a:srcRect/>
+          <a:stretch>
+            <a:fillRect/>
+          </a:stretch>
+        </p:blipFill>
+        <p:spPr bwMode="auto">
           <a:xfrm>
-            <a:off x="326848" y="1597323"/>
-            <a:ext cx="8683510" cy="2308324"/>
+            <a:off x="633046" y="1697762"/>
+            <a:ext cx="5887328" cy="3300280"/>
           </a:xfrm>
           <a:prstGeom prst="rect">
             <a:avLst/>
           </a:prstGeom>
           <a:noFill/>
+          <a:extLst>
+            <a:ext uri="{909E8E84-426E-40DD-AFC4-6F175D3DCCD1}">
+              <a14:hiddenFill xmlns:a14="http://schemas.microsoft.com/office/drawing/2010/main">
+                <a:solidFill>
+                  <a:srgbClr val="FFFFFF"/>
+                </a:solidFill>
+              </a14:hiddenFill>
+            </a:ext>
+          </a:extLst>
         </p:spPr>
-        <p:txBody>
-          <a:bodyPr wrap="square">
-            <a:spAutoFit/>
-          </a:bodyPr>
-          <a:lstStyle/>
-          <a:p>
-            <a:r>
-              <a:rPr lang="en-US" b="1" dirty="0"/>
-              <a:t>1.Data Collection Layer</a:t>
-            </a:r>
-          </a:p>
-          <a:p>
-            <a:r>
-              <a:rPr lang="en-US" dirty="0"/>
-              <a:t>Collects student feedback through surveys/forms </a:t>
-            </a:r>
-          </a:p>
-          <a:p>
-            <a:r>
-              <a:rPr lang="en-US" dirty="0"/>
-              <a:t>Includes </a:t>
-            </a:r>
-            <a:r>
-              <a:rPr lang="en-US" b="1" dirty="0"/>
-              <a:t>ratings and textual comments</a:t>
-            </a:r>
-            <a:r>
-              <a:rPr lang="en-US" dirty="0"/>
-              <a:t> </a:t>
-            </a:r>
-          </a:p>
-          <a:p>
-            <a:r>
-              <a:rPr lang="en-US" dirty="0"/>
-              <a:t>Stores raw data for further processing </a:t>
-            </a:r>
-          </a:p>
-          <a:p>
-            <a:r>
-              <a:rPr lang="en-US" b="1" dirty="0"/>
-              <a:t>2. Data Preprocessing Layer</a:t>
-            </a:r>
-          </a:p>
-          <a:p>
-            <a:r>
-              <a:rPr lang="en-US" dirty="0"/>
-              <a:t>Cleans and structures the data </a:t>
-            </a:r>
-          </a:p>
-          <a:p>
-            <a:r>
-              <a:rPr lang="en-US" dirty="0"/>
-              <a:t>Removes noise and missing values </a:t>
-            </a:r>
-          </a:p>
-          <a:p>
-            <a:r>
-              <a:rPr lang="en-US" dirty="0"/>
-              <a:t>Converts unstructured text into analyzable format</a:t>
-            </a:r>
-          </a:p>
-        </p:txBody>
-      </p:sp>
+      </p:pic>
     </p:spTree>
     <p:custDataLst>
       <p:tags r:id="rId1"/>
@@ -6855,135 +7703,53 @@
           </a:p>
         </p:txBody>
       </p:sp>
-      <p:sp>
-        <p:nvSpPr>
-          <p:cNvPr id="13" name="Text 11">
+      <p:pic>
+        <p:nvPicPr>
+          <p:cNvPr id="2050" name="Picture 2" descr="Bot Verification">
             <a:extLst>
               <a:ext uri="{FF2B5EF4-FFF2-40B4-BE49-F238E27FC236}">
-                <a16:creationId xmlns:a16="http://schemas.microsoft.com/office/drawing/2014/main" id="{D20BFC21-5190-5F06-8ADA-4589368BE763}"/>
+                <a16:creationId xmlns:a16="http://schemas.microsoft.com/office/drawing/2014/main" id="{18A61EDB-9E0C-1B67-1EFA-87358CB5529F}"/>
               </a:ext>
             </a:extLst>
           </p:cNvPr>
-          <p:cNvSpPr/>
+          <p:cNvPicPr>
+            <a:picLocks noChangeAspect="1" noChangeArrowheads="1"/>
+          </p:cNvPicPr>
           <p:nvPr/>
-        </p:nvSpPr>
-        <p:spPr>
+        </p:nvPicPr>
+        <p:blipFill>
+          <a:blip r:embed="rId4">
+            <a:extLst>
+              <a:ext uri="{28A0092B-C50C-407E-A947-70E740481C1C}">
+                <a14:useLocalDpi xmlns:a14="http://schemas.microsoft.com/office/drawing/2010/main" val="0"/>
+              </a:ext>
+            </a:extLst>
+          </a:blip>
+          <a:srcRect/>
+          <a:stretch>
+            <a:fillRect/>
+          </a:stretch>
+        </p:blipFill>
+        <p:spPr bwMode="auto">
           <a:xfrm>
-            <a:off x="130350" y="1425881"/>
-            <a:ext cx="8654698" cy="3455608"/>
+            <a:off x="210788" y="1425881"/>
+            <a:ext cx="5397531" cy="3466160"/>
           </a:xfrm>
           <a:prstGeom prst="rect">
             <a:avLst/>
           </a:prstGeom>
           <a:noFill/>
-          <a:ln/>
+          <a:extLst>
+            <a:ext uri="{909E8E84-426E-40DD-AFC4-6F175D3DCCD1}">
+              <a14:hiddenFill xmlns:a14="http://schemas.microsoft.com/office/drawing/2010/main">
+                <a:solidFill>
+                  <a:srgbClr val="FFFFFF"/>
+                </a:solidFill>
+              </a14:hiddenFill>
+            </a:ext>
+          </a:extLst>
         </p:spPr>
-        <p:txBody>
-          <a:bodyPr wrap="square" rtlCol="0" anchor="t"/>
-          <a:lstStyle/>
-          <a:p>
-            <a:pPr marL="285750" indent="-285750">
-              <a:buFont typeface="Wingdings" panose="05000000000000000000" pitchFamily="2" charset="2"/>
-              <a:buChar char="Ø"/>
-            </a:pPr>
-            <a:r>
-              <a:rPr lang="en-US" sz="1600" dirty="0"/>
-              <a:t>Data is </a:t>
-            </a:r>
-            <a:r>
-              <a:rPr lang="en-US" sz="1600" b="1" dirty="0"/>
-              <a:t>cleaned and preprocessed</a:t>
-            </a:r>
-            <a:r>
-              <a:rPr lang="en-US" sz="1600" dirty="0"/>
-              <a:t> by removing missing values and irrelevant entries </a:t>
-            </a:r>
-          </a:p>
-          <a:p>
-            <a:pPr marL="285750" indent="-285750">
-              <a:buFont typeface="Wingdings" panose="05000000000000000000" pitchFamily="2" charset="2"/>
-              <a:buChar char="Ø"/>
-            </a:pPr>
-            <a:r>
-              <a:rPr lang="en-US" sz="1600" dirty="0"/>
-              <a:t>Text feedback is </a:t>
-            </a:r>
-            <a:r>
-              <a:rPr lang="en-US" sz="1600" b="1" dirty="0"/>
-              <a:t>transformed into structured format</a:t>
-            </a:r>
-            <a:r>
-              <a:rPr lang="en-US" sz="1600" dirty="0"/>
-              <a:t> for analysis </a:t>
-            </a:r>
-          </a:p>
-          <a:p>
-            <a:pPr marL="285750" indent="-285750">
-              <a:buFont typeface="Wingdings" panose="05000000000000000000" pitchFamily="2" charset="2"/>
-              <a:buChar char="Ø"/>
-            </a:pPr>
-            <a:r>
-              <a:rPr lang="en-US" sz="1600" b="1" dirty="0"/>
-              <a:t>Sentiment analysis</a:t>
-            </a:r>
-            <a:r>
-              <a:rPr lang="en-US" sz="1600" dirty="0"/>
-              <a:t> is applied to classify comments as positive or negative </a:t>
-            </a:r>
-          </a:p>
-          <a:p>
-            <a:pPr marL="285750" indent="-285750">
-              <a:buFont typeface="Wingdings" panose="05000000000000000000" pitchFamily="2" charset="2"/>
-              <a:buChar char="Ø"/>
-            </a:pPr>
-            <a:r>
-              <a:rPr lang="en-US" sz="1600" b="1" dirty="0"/>
-              <a:t>Statistical analysis</a:t>
-            </a:r>
-            <a:r>
-              <a:rPr lang="en-US" sz="1600" dirty="0"/>
-              <a:t> is performed on ratings to calculate averages and performance scores </a:t>
-            </a:r>
-          </a:p>
-          <a:p>
-            <a:pPr marL="285750" indent="-285750">
-              <a:buFont typeface="Wingdings" panose="05000000000000000000" pitchFamily="2" charset="2"/>
-              <a:buChar char="Ø"/>
-            </a:pPr>
-            <a:r>
-              <a:rPr lang="en-US" sz="1600" b="1" dirty="0"/>
-              <a:t>Correlation analysis</a:t>
-            </a:r>
-            <a:r>
-              <a:rPr lang="en-US" sz="1600" dirty="0"/>
-              <a:t> identifies relationships between teaching parameters (e.g., communication vs overall rating) </a:t>
-            </a:r>
-          </a:p>
-          <a:p>
-            <a:pPr marL="285750" indent="-285750">
-              <a:buFont typeface="Wingdings" panose="05000000000000000000" pitchFamily="2" charset="2"/>
-              <a:buChar char="Ø"/>
-            </a:pPr>
-            <a:r>
-              <a:rPr lang="en-US" sz="1600" b="1" dirty="0"/>
-              <a:t>Trend analysis</a:t>
-            </a:r>
-            <a:r>
-              <a:rPr lang="en-US" sz="1600" dirty="0"/>
-              <a:t> is used to track performance over time</a:t>
-            </a:r>
-          </a:p>
-          <a:p>
-            <a:pPr marL="0" indent="0">
-              <a:buNone/>
-            </a:pPr>
-            <a:endParaRPr lang="en-US" sz="1600" dirty="0">
-              <a:latin typeface="Lato" panose="020F0502020204030203" pitchFamily="34" charset="0"/>
-              <a:cs typeface="Arial" panose="020B0604020202020204" pitchFamily="34" charset="0"/>
-            </a:endParaRPr>
-          </a:p>
-        </p:txBody>
-      </p:sp>
+      </p:pic>
     </p:spTree>
     <p:custDataLst>
       <p:tags r:id="rId1"/>
@@ -7334,7 +8100,7 @@
         </p:nvSpPr>
         <p:spPr>
           <a:xfrm>
-            <a:off x="130350" y="602920"/>
+            <a:off x="130350" y="453300"/>
             <a:ext cx="8229600" cy="438912"/>
           </a:xfrm>
           <a:prstGeom prst="rect">
@@ -7382,7 +8148,7 @@
         </p:nvSpPr>
         <p:spPr>
           <a:xfrm>
-            <a:off x="130350" y="1064506"/>
+            <a:off x="84630" y="833612"/>
             <a:ext cx="4114800" cy="384048"/>
           </a:xfrm>
           <a:prstGeom prst="rect">
@@ -7420,7 +8186,7 @@
         </p:nvSpPr>
         <p:spPr>
           <a:xfrm>
-            <a:off x="4245150" y="1064506"/>
+            <a:off x="4237530" y="827808"/>
             <a:ext cx="320040" cy="384048"/>
           </a:xfrm>
           <a:prstGeom prst="rect">
@@ -7455,7 +8221,7 @@
         </p:nvSpPr>
         <p:spPr>
           <a:xfrm>
-            <a:off x="130350" y="1050439"/>
+            <a:off x="130350" y="864384"/>
             <a:ext cx="3840480" cy="310896"/>
           </a:xfrm>
           <a:prstGeom prst="rect">
@@ -7522,10 +8288,10 @@
       </p:sp>
       <p:pic>
         <p:nvPicPr>
-          <p:cNvPr id="3" name="Picture 2">
+          <p:cNvPr id="2" name="Graphic 2">
             <a:extLst>
               <a:ext uri="{FF2B5EF4-FFF2-40B4-BE49-F238E27FC236}">
-                <a16:creationId xmlns:a16="http://schemas.microsoft.com/office/drawing/2014/main" id="{01096FD4-7E10-5FE8-B974-1CFC27E03E73}"/>
+                <a16:creationId xmlns:a16="http://schemas.microsoft.com/office/drawing/2014/main" id="{FFDD4A31-A8B4-F951-5760-2A1AD5070597}"/>
               </a:ext>
             </a:extLst>
           </p:cNvPr>
@@ -7535,15 +8301,21 @@
           <p:nvPr/>
         </p:nvPicPr>
         <p:blipFill>
-          <a:blip r:embed="rId4"/>
+          <a:blip>
+            <a:extLst>
+              <a:ext uri="{96DAC541-7B7A-43D3-8B79-37D633B846F1}">
+                <asvg:svgBlip xmlns:asvg="http://schemas.microsoft.com/office/drawing/2016/SVG/main" r:embed="rId4"/>
+              </a:ext>
+            </a:extLst>
+          </a:blip>
           <a:stretch>
             <a:fillRect/>
           </a:stretch>
         </p:blipFill>
         <p:spPr>
           <a:xfrm>
-            <a:off x="295422" y="1549019"/>
-            <a:ext cx="7305527" cy="3445012"/>
+            <a:off x="267510" y="1266720"/>
+            <a:ext cx="8373570" cy="3648240"/>
           </a:xfrm>
           <a:prstGeom prst="rect">
             <a:avLst/>
